--- a/copilot_demo.pptx
+++ b/copilot_demo.pptx
@@ -6644,13 +6644,49 @@
           <a:p>
             <a:pPr algn="l"/>
             <a:r>
-              <a:rPr sz="1100" b="0" i="0">
+              <a:rPr sz="1100" b="0" i="0" dirty="0">
                 <a:solidFill>
                   <a:srgbClr val="E6EDF3"/>
                 </a:solidFill>
                 <a:latin typeface="Courier New"/>
               </a:rPr>
-              <a:t>You  /explain get_overdue_tasks  →  Copilot:  Returns all incomplete tasks whose due_date is before today...</a:t>
+              <a:t>You  /explain </a:t>
+            </a:r>
+            <a:r>
+              <a:rPr sz="1100" b="0" i="0" dirty="0" err="1">
+                <a:solidFill>
+                  <a:srgbClr val="E6EDF3"/>
+                </a:solidFill>
+                <a:latin typeface="Courier New"/>
+              </a:rPr>
+              <a:t>get_overdue_tasks</a:t>
+            </a:r>
+            <a:r>
+              <a:rPr sz="1100" b="0" i="0" dirty="0">
+                <a:solidFill>
+                  <a:srgbClr val="E6EDF3"/>
+                </a:solidFill>
+                <a:latin typeface="Courier New"/>
+              </a:rPr>
+              <a:t>  →  Copilot:  Returns all incomplete tasks whose </a:t>
+            </a:r>
+            <a:r>
+              <a:rPr sz="1100" b="0" i="0" dirty="0" err="1">
+                <a:solidFill>
+                  <a:srgbClr val="E6EDF3"/>
+                </a:solidFill>
+                <a:latin typeface="Courier New"/>
+              </a:rPr>
+              <a:t>due_date</a:t>
+            </a:r>
+            <a:r>
+              <a:rPr sz="1100" b="0" i="0" dirty="0">
+                <a:solidFill>
+                  <a:srgbClr val="E6EDF3"/>
+                </a:solidFill>
+                <a:latin typeface="Courier New"/>
+              </a:rPr>
+              <a:t> is before today...</a:t>
             </a:r>
           </a:p>
         </p:txBody>
@@ -7383,7 +7419,7 @@
           <a:p>
             <a:pPr algn="l"/>
             <a:r>
-              <a:rPr sz="1200" b="0" i="0">
+              <a:rPr sz="1200" b="0" i="0" dirty="0">
                 <a:solidFill>
                   <a:srgbClr val="E6EDF3"/>
                 </a:solidFill>
@@ -8944,16 +8980,52 @@
           <a:p>
             <a:pPr algn="l"/>
             <a:r>
-              <a:rPr sz="1050" b="0" i="1">
+              <a:rPr sz="1050" b="0" i="1" dirty="0">
                 <a:solidFill>
                   <a:srgbClr val="58A6FF"/>
                 </a:solidFill>
                 <a:latin typeface="Courier New"/>
               </a:rPr>
-              <a:t>"Write pytest tests for task_manager.py.
+              <a:t>"Write </a:t>
+            </a:r>
+            <a:r>
+              <a:rPr sz="1050" b="0" i="1" dirty="0" err="1">
+                <a:solidFill>
+                  <a:srgbClr val="58A6FF"/>
+                </a:solidFill>
+                <a:latin typeface="Courier New"/>
+              </a:rPr>
+              <a:t>pytest</a:t>
+            </a:r>
+            <a:r>
+              <a:rPr sz="1050" b="0" i="1" dirty="0">
+                <a:solidFill>
+                  <a:srgbClr val="58A6FF"/>
+                </a:solidFill>
+                <a:latin typeface="Courier New"/>
+              </a:rPr>
+              <a:t> tests for task_manager.py.
 Cover all public functions, include
 edge cases and fixtures that reset state.
-Save to test_task_manager.py, run pytest,
+Save to test_task_manager.py, run </a:t>
+            </a:r>
+            <a:r>
+              <a:rPr sz="1050" b="0" i="1" dirty="0" err="1">
+                <a:solidFill>
+                  <a:srgbClr val="58A6FF"/>
+                </a:solidFill>
+                <a:latin typeface="Courier New"/>
+              </a:rPr>
+              <a:t>pytest</a:t>
+            </a:r>
+            <a:r>
+              <a:rPr sz="1050" b="0" i="1" dirty="0">
+                <a:solidFill>
+                  <a:srgbClr val="58A6FF"/>
+                </a:solidFill>
+                <a:latin typeface="Courier New"/>
+              </a:rPr>
+              <a:t>,
 and fix any failures automatically."</a:t>
             </a:r>
           </a:p>
@@ -9850,42 +9922,54 @@
           <a:p>
             <a:pPr algn="l"/>
             <a:r>
-              <a:rPr sz="1000" b="0" i="0">
+              <a:rPr sz="1000" b="0" i="0" dirty="0">
                 <a:solidFill>
                   <a:srgbClr val="3FB950"/>
                 </a:solidFill>
                 <a:latin typeface="Courier New"/>
               </a:rPr>
-              <a:t>$ pytest test_task_manager.py -v</a:t>
-            </a:r>
-          </a:p>
-          <a:p>
-            <a:pPr algn="l"/>
-            <a:r>
-              <a:rPr sz="1000" b="0" i="0">
+              <a:t>$ </a:t>
+            </a:r>
+            <a:r>
+              <a:rPr sz="1000" b="0" i="0" dirty="0" err="1">
+                <a:solidFill>
+                  <a:srgbClr val="3FB950"/>
+                </a:solidFill>
+                <a:latin typeface="Courier New"/>
+              </a:rPr>
+              <a:t>pytest</a:t>
+            </a:r>
+            <a:r>
+              <a:rPr sz="1000" b="0" i="0" dirty="0">
+                <a:solidFill>
+                  <a:srgbClr val="3FB950"/>
+                </a:solidFill>
+                <a:latin typeface="Courier New"/>
+              </a:rPr>
+              <a:t> test_task_manager.py -v</a:t>
+            </a:r>
+          </a:p>
+          <a:p>
+            <a:pPr algn="l"/>
+            <a:r>
+              <a:rPr sz="1000" b="0" i="0" dirty="0">
                 <a:solidFill>
                   <a:srgbClr val="F78166"/>
                 </a:solidFill>
                 <a:latin typeface="Courier New"/>
               </a:rPr>
-              <a:t>FAILED test_task_manager.py::TestCompleteTask::test_completed_at_is_set</a:t>
-            </a:r>
-          </a:p>
-          <a:p>
-            <a:pPr algn="l"/>
-            <a:r>
-              <a:rPr sz="1000" b="0" i="0">
+              <a:t>FAILED test_task_manager.py::TestCompleteTask::</a:t>
+            </a:r>
+            <a:r>
+              <a:rPr sz="1000" b="0" i="0" dirty="0" err="1">
                 <a:solidFill>
                   <a:srgbClr val="F78166"/>
                 </a:solidFill>
                 <a:latin typeface="Courier New"/>
               </a:rPr>
-              <a:t>AssertionError: 'completed_at' not in task</a:t>
-            </a:r>
-          </a:p>
-          <a:p>
-            <a:pPr algn="l"/>
-            <a:endParaRPr sz="1000" b="0" i="0">
+              <a:t>test_completed_at_is_set</a:t>
+            </a:r>
+            <a:endParaRPr sz="1000" b="0" i="0" dirty="0">
               <a:solidFill>
                 <a:srgbClr val="F78166"/>
               </a:solidFill>
@@ -9895,7 +9979,55 @@
           <a:p>
             <a:pPr algn="l"/>
             <a:r>
-              <a:rPr sz="1000" b="0" i="1">
+              <a:rPr sz="1000" b="0" i="0" dirty="0" err="1">
+                <a:solidFill>
+                  <a:srgbClr val="F78166"/>
+                </a:solidFill>
+                <a:latin typeface="Courier New"/>
+              </a:rPr>
+              <a:t>AssertionError</a:t>
+            </a:r>
+            <a:r>
+              <a:rPr sz="1000" b="0" i="0" dirty="0">
+                <a:solidFill>
+                  <a:srgbClr val="F78166"/>
+                </a:solidFill>
+                <a:latin typeface="Courier New"/>
+              </a:rPr>
+              <a:t>: '</a:t>
+            </a:r>
+            <a:r>
+              <a:rPr sz="1000" b="0" i="0" dirty="0" err="1">
+                <a:solidFill>
+                  <a:srgbClr val="F78166"/>
+                </a:solidFill>
+                <a:latin typeface="Courier New"/>
+              </a:rPr>
+              <a:t>completed_at</a:t>
+            </a:r>
+            <a:r>
+              <a:rPr sz="1000" b="0" i="0" dirty="0">
+                <a:solidFill>
+                  <a:srgbClr val="F78166"/>
+                </a:solidFill>
+                <a:latin typeface="Courier New"/>
+              </a:rPr>
+              <a:t>' not in task</a:t>
+            </a:r>
+          </a:p>
+          <a:p>
+            <a:pPr algn="l"/>
+            <a:endParaRPr sz="1000" b="0" i="0" dirty="0">
+              <a:solidFill>
+                <a:srgbClr val="F78166"/>
+              </a:solidFill>
+              <a:latin typeface="Courier New"/>
+            </a:endParaRPr>
+          </a:p>
+          <a:p>
+            <a:pPr algn="l"/>
+            <a:r>
+              <a:rPr sz="1000" b="0" i="1" dirty="0">
                 <a:solidFill>
                   <a:srgbClr val="E3B341"/>
                 </a:solidFill>
@@ -9907,18 +10039,54 @@
           <a:p>
             <a:pPr algn="l"/>
             <a:r>
-              <a:rPr sz="1000" b="0" i="1">
+              <a:rPr sz="1000" b="0" i="1" dirty="0">
                 <a:solidFill>
                   <a:srgbClr val="E3B341"/>
                 </a:solidFill>
                 <a:latin typeface="Courier New"/>
               </a:rPr>
-              <a:t>► Patching complete_task() → adding completed_at field</a:t>
-            </a:r>
-          </a:p>
-          <a:p>
-            <a:pPr algn="l"/>
-            <a:endParaRPr sz="1000" b="0" i="1">
+              <a:t>► Patching </a:t>
+            </a:r>
+            <a:r>
+              <a:rPr sz="1000" b="0" i="1" dirty="0" err="1">
+                <a:solidFill>
+                  <a:srgbClr val="E3B341"/>
+                </a:solidFill>
+                <a:latin typeface="Courier New"/>
+              </a:rPr>
+              <a:t>complete_task</a:t>
+            </a:r>
+            <a:r>
+              <a:rPr sz="1000" b="0" i="1" dirty="0">
+                <a:solidFill>
+                  <a:srgbClr val="E3B341"/>
+                </a:solidFill>
+                <a:latin typeface="Courier New"/>
+              </a:rPr>
+              <a:t>() → adding </a:t>
+            </a:r>
+            <a:r>
+              <a:rPr sz="1000" b="0" i="1" dirty="0" err="1">
+                <a:solidFill>
+                  <a:srgbClr val="E3B341"/>
+                </a:solidFill>
+                <a:latin typeface="Courier New"/>
+              </a:rPr>
+              <a:t>completed_at</a:t>
+            </a:r>
+            <a:r>
+              <a:rPr sz="1000" b="0" i="1" dirty="0">
+                <a:solidFill>
+                  <a:srgbClr val="E3B341"/>
+                </a:solidFill>
+                <a:latin typeface="Courier New"/>
+              </a:rPr>
+              <a:t> field</a:t>
+            </a:r>
+          </a:p>
+          <a:p>
+            <a:pPr algn="l"/>
+            <a:endParaRPr sz="1000" b="0" i="1" dirty="0">
               <a:solidFill>
                 <a:srgbClr val="E3B341"/>
               </a:solidFill>
@@ -9928,66 +10096,72 @@
           <a:p>
             <a:pPr algn="l"/>
             <a:r>
-              <a:rPr sz="1000" b="0" i="0">
+              <a:rPr sz="1000" b="0" i="0" dirty="0">
                 <a:solidFill>
                   <a:srgbClr val="3FB950"/>
                 </a:solidFill>
                 <a:latin typeface="Courier New"/>
               </a:rPr>
-              <a:t>$ pytest test_task_manager.py -v</a:t>
-            </a:r>
-          </a:p>
-          <a:p>
-            <a:pPr algn="l"/>
-            <a:r>
-              <a:rPr sz="1000" b="0" i="0">
+              <a:t>$ </a:t>
+            </a:r>
+            <a:r>
+              <a:rPr sz="1000" b="0" i="0" dirty="0" err="1">
                 <a:solidFill>
                   <a:srgbClr val="3FB950"/>
                 </a:solidFill>
                 <a:latin typeface="Courier New"/>
               </a:rPr>
-              <a:t>PASSED  TestAddTask::test_returns_dict_with_expected_keys</a:t>
-            </a:r>
-          </a:p>
-          <a:p>
-            <a:pPr algn="l"/>
-            <a:r>
-              <a:rPr sz="1000" b="0" i="0">
+              <a:t>pytest</a:t>
+            </a:r>
+            <a:r>
+              <a:rPr sz="1000" b="0" i="0" dirty="0">
                 <a:solidFill>
                   <a:srgbClr val="3FB950"/>
                 </a:solidFill>
                 <a:latin typeface="Courier New"/>
               </a:rPr>
-              <a:t>PASSED  TestCompleteTask::test_completed_at_is_set</a:t>
-            </a:r>
-          </a:p>
-          <a:p>
-            <a:pPr algn="l"/>
-            <a:r>
-              <a:rPr sz="1000" b="0" i="0">
+              <a:t> test_task_manager.py -v</a:t>
+            </a:r>
+          </a:p>
+          <a:p>
+            <a:pPr algn="l"/>
+            <a:r>
+              <a:rPr sz="1000" b="0" i="0" dirty="0">
                 <a:solidFill>
                   <a:srgbClr val="3FB950"/>
                 </a:solidFill>
                 <a:latin typeface="Courier New"/>
               </a:rPr>
-              <a:t>PASSED  TestGetOverdueTasks::test_returns_overdue_incomplete_tasks</a:t>
-            </a:r>
-          </a:p>
-          <a:p>
-            <a:pPr algn="l"/>
-            <a:r>
-              <a:rPr sz="1000" b="0" i="0">
+              <a:t>PASSED  </a:t>
+            </a:r>
+            <a:r>
+              <a:rPr sz="1000" b="0" i="0" dirty="0" err="1">
                 <a:solidFill>
                   <a:srgbClr val="3FB950"/>
                 </a:solidFill>
                 <a:latin typeface="Courier New"/>
               </a:rPr>
-              <a:t>PASSED  TestUpdateTask::test_raises_for_missing_task</a:t>
-            </a:r>
-          </a:p>
-          <a:p>
-            <a:pPr algn="l"/>
-            <a:endParaRPr sz="1000" b="0" i="0">
+              <a:t>TestAddTask</a:t>
+            </a:r>
+            <a:r>
+              <a:rPr sz="1000" b="0" i="0" dirty="0">
+                <a:solidFill>
+                  <a:srgbClr val="3FB950"/>
+                </a:solidFill>
+                <a:latin typeface="Courier New"/>
+              </a:rPr>
+              <a:t>::</a:t>
+            </a:r>
+            <a:r>
+              <a:rPr sz="1000" b="0" i="0" dirty="0" err="1">
+                <a:solidFill>
+                  <a:srgbClr val="3FB950"/>
+                </a:solidFill>
+                <a:latin typeface="Courier New"/>
+              </a:rPr>
+              <a:t>test_returns_dict_with_expected_keys</a:t>
+            </a:r>
+            <a:endParaRPr sz="1000" b="0" i="0" dirty="0">
               <a:solidFill>
                 <a:srgbClr val="3FB950"/>
               </a:solidFill>
@@ -9997,7 +10171,133 @@
           <a:p>
             <a:pPr algn="l"/>
             <a:r>
-              <a:rPr sz="1100" b="1" i="0">
+              <a:rPr sz="1000" b="0" i="0" dirty="0">
+                <a:solidFill>
+                  <a:srgbClr val="3FB950"/>
+                </a:solidFill>
+                <a:latin typeface="Courier New"/>
+              </a:rPr>
+              <a:t>PASSED  TestCompleteTask::</a:t>
+            </a:r>
+            <a:r>
+              <a:rPr sz="1000" b="0" i="0" dirty="0" err="1">
+                <a:solidFill>
+                  <a:srgbClr val="3FB950"/>
+                </a:solidFill>
+                <a:latin typeface="Courier New"/>
+              </a:rPr>
+              <a:t>test_completed_at_is_set</a:t>
+            </a:r>
+            <a:endParaRPr sz="1000" b="0" i="0" dirty="0">
+              <a:solidFill>
+                <a:srgbClr val="3FB950"/>
+              </a:solidFill>
+              <a:latin typeface="Courier New"/>
+            </a:endParaRPr>
+          </a:p>
+          <a:p>
+            <a:pPr algn="l"/>
+            <a:r>
+              <a:rPr sz="1000" b="0" i="0" dirty="0">
+                <a:solidFill>
+                  <a:srgbClr val="3FB950"/>
+                </a:solidFill>
+                <a:latin typeface="Courier New"/>
+              </a:rPr>
+              <a:t>PASSED  </a:t>
+            </a:r>
+            <a:r>
+              <a:rPr sz="1000" b="0" i="0" dirty="0" err="1">
+                <a:solidFill>
+                  <a:srgbClr val="3FB950"/>
+                </a:solidFill>
+                <a:latin typeface="Courier New"/>
+              </a:rPr>
+              <a:t>TestGetOverdueTasks</a:t>
+            </a:r>
+            <a:r>
+              <a:rPr sz="1000" b="0" i="0" dirty="0">
+                <a:solidFill>
+                  <a:srgbClr val="3FB950"/>
+                </a:solidFill>
+                <a:latin typeface="Courier New"/>
+              </a:rPr>
+              <a:t>::</a:t>
+            </a:r>
+            <a:r>
+              <a:rPr sz="1000" b="0" i="0" dirty="0" err="1">
+                <a:solidFill>
+                  <a:srgbClr val="3FB950"/>
+                </a:solidFill>
+                <a:latin typeface="Courier New"/>
+              </a:rPr>
+              <a:t>test_returns_overdue_incomplete_tasks</a:t>
+            </a:r>
+            <a:endParaRPr sz="1000" b="0" i="0" dirty="0">
+              <a:solidFill>
+                <a:srgbClr val="3FB950"/>
+              </a:solidFill>
+              <a:latin typeface="Courier New"/>
+            </a:endParaRPr>
+          </a:p>
+          <a:p>
+            <a:pPr algn="l"/>
+            <a:r>
+              <a:rPr sz="1000" b="0" i="0" dirty="0">
+                <a:solidFill>
+                  <a:srgbClr val="3FB950"/>
+                </a:solidFill>
+                <a:latin typeface="Courier New"/>
+              </a:rPr>
+              <a:t>PASSED  </a:t>
+            </a:r>
+            <a:r>
+              <a:rPr sz="1000" b="0" i="0" dirty="0" err="1">
+                <a:solidFill>
+                  <a:srgbClr val="3FB950"/>
+                </a:solidFill>
+                <a:latin typeface="Courier New"/>
+              </a:rPr>
+              <a:t>TestUpdateTask</a:t>
+            </a:r>
+            <a:r>
+              <a:rPr sz="1000" b="0" i="0" dirty="0">
+                <a:solidFill>
+                  <a:srgbClr val="3FB950"/>
+                </a:solidFill>
+                <a:latin typeface="Courier New"/>
+              </a:rPr>
+              <a:t>::</a:t>
+            </a:r>
+            <a:r>
+              <a:rPr sz="1000" b="0" i="0" dirty="0" err="1">
+                <a:solidFill>
+                  <a:srgbClr val="3FB950"/>
+                </a:solidFill>
+                <a:latin typeface="Courier New"/>
+              </a:rPr>
+              <a:t>test_raises_for_missing_task</a:t>
+            </a:r>
+            <a:endParaRPr sz="1000" b="0" i="0" dirty="0">
+              <a:solidFill>
+                <a:srgbClr val="3FB950"/>
+              </a:solidFill>
+              <a:latin typeface="Courier New"/>
+            </a:endParaRPr>
+          </a:p>
+          <a:p>
+            <a:pPr algn="l"/>
+            <a:endParaRPr sz="1000" b="0" i="0" dirty="0">
+              <a:solidFill>
+                <a:srgbClr val="3FB950"/>
+              </a:solidFill>
+              <a:latin typeface="Courier New"/>
+            </a:endParaRPr>
+          </a:p>
+          <a:p>
+            <a:pPr algn="l"/>
+            <a:r>
+              <a:rPr sz="1100" b="1" i="0" dirty="0">
                 <a:solidFill>
                   <a:srgbClr val="3FB950"/>
                 </a:solidFill>
@@ -11064,7 +11364,7 @@
           <a:p>
             <a:pPr algn="l"/>
             <a:r>
-              <a:rPr sz="1100" b="0" i="1">
+              <a:rPr sz="1100" b="0" i="1" dirty="0">
                 <a:solidFill>
                   <a:srgbClr val="58A6FF"/>
                 </a:solidFill>
@@ -11102,7 +11402,7 @@
           <a:p>
             <a:pPr algn="l"/>
             <a:r>
-              <a:rPr sz="1100" b="0" i="1">
+              <a:rPr sz="1100" b="0" i="1" dirty="0">
                 <a:solidFill>
                   <a:srgbClr val="58A6FF"/>
                 </a:solidFill>
@@ -11140,13 +11440,31 @@
           <a:p>
             <a:pPr algn="l"/>
             <a:r>
-              <a:rPr sz="1100" b="0" i="1">
+              <a:rPr sz="1100" b="0" i="1" dirty="0">
                 <a:solidFill>
                   <a:srgbClr val="58A6FF"/>
                 </a:solidFill>
                 <a:latin typeface="Courier New"/>
               </a:rPr>
-              <a:t>"Add input validation for allowed_fields"</a:t>
+              <a:t>"Add input validation for </a:t>
+            </a:r>
+            <a:r>
+              <a:rPr sz="1100" b="0" i="1" dirty="0" err="1">
+                <a:solidFill>
+                  <a:srgbClr val="58A6FF"/>
+                </a:solidFill>
+                <a:latin typeface="Courier New"/>
+              </a:rPr>
+              <a:t>allowed_fields</a:t>
+            </a:r>
+            <a:r>
+              <a:rPr sz="1100" b="0" i="1" dirty="0">
+                <a:solidFill>
+                  <a:srgbClr val="58A6FF"/>
+                </a:solidFill>
+                <a:latin typeface="Courier New"/>
+              </a:rPr>
+              <a:t>"</a:t>
             </a:r>
           </a:p>
         </p:txBody>
@@ -11514,7 +11832,7 @@
           <a:p>
             <a:pPr algn="l"/>
             <a:r>
-              <a:rPr sz="1100" b="0" i="0">
+              <a:rPr sz="1100" b="0" i="0" dirty="0">
                 <a:solidFill>
                   <a:srgbClr val="E6EDF3"/>
                 </a:solidFill>
